--- a/愛我們的家(崇拜版).pptx
+++ b/愛我們的家(崇拜版).pptx
@@ -108,6 +108,11 @@
       </a:defRPr>
     </a:lvl9pPr>
   </p:defaultTextStyle>
+  <p:extLst>
+    <p:ext uri="{EFAFB233-063F-42B5-8137-9DF3F51BA10A}">
+      <p15:sldGuideLst xmlns:p15="http://schemas.microsoft.com/office/powerpoint/2012/main"/>
+    </p:ext>
+  </p:extLst>
 </p:presentation>
 </file>
 
@@ -149,7 +154,7 @@
           <a:lstStyle/>
           <a:p>
             <a:r>
-              <a:rPr lang="en-US" altLang="zh-TW" smtClean="0"/>
+              <a:rPr lang="en-US" altLang="zh-TW"/>
               <a:t>Click to edit Master title style</a:t>
             </a:r>
             <a:endParaRPr lang="zh-TW" altLang="en-US"/>
@@ -268,7 +273,7 @@
           </a:lstStyle>
           <a:p>
             <a:r>
-              <a:rPr lang="en-US" altLang="zh-TW" smtClean="0"/>
+              <a:rPr lang="en-US" altLang="zh-TW"/>
               <a:t>Click to edit Master subtitle style</a:t>
             </a:r>
             <a:endParaRPr lang="zh-TW" altLang="en-US"/>
@@ -292,7 +297,7 @@
           <a:p>
             <a:fld id="{A7256215-C5DB-4B38-9517-E992CBA3016F}" type="datetimeFigureOut">
               <a:rPr lang="vi-VN" smtClean="0"/>
-              <a:t>09/06/2022</a:t>
+              <a:t>26/01/2025</a:t>
             </a:fld>
             <a:endParaRPr lang="vi-VN"/>
           </a:p>
@@ -386,7 +391,7 @@
           <a:lstStyle/>
           <a:p>
             <a:r>
-              <a:rPr lang="en-US" altLang="zh-TW" smtClean="0"/>
+              <a:rPr lang="en-US" altLang="zh-TW"/>
               <a:t>Click to edit Master title style</a:t>
             </a:r>
             <a:endParaRPr lang="zh-TW" altLang="en-US"/>
@@ -410,35 +415,35 @@
           <a:p>
             <a:pPr lvl="0"/>
             <a:r>
-              <a:rPr lang="en-US" altLang="zh-TW" smtClean="0"/>
+              <a:rPr lang="en-US" altLang="zh-TW"/>
               <a:t>Edit Master text styles</a:t>
             </a:r>
           </a:p>
           <a:p>
             <a:pPr lvl="1"/>
             <a:r>
-              <a:rPr lang="en-US" altLang="zh-TW" smtClean="0"/>
+              <a:rPr lang="en-US" altLang="zh-TW"/>
               <a:t>Second level</a:t>
             </a:r>
           </a:p>
           <a:p>
             <a:pPr lvl="2"/>
             <a:r>
-              <a:rPr lang="en-US" altLang="zh-TW" smtClean="0"/>
+              <a:rPr lang="en-US" altLang="zh-TW"/>
               <a:t>Third level</a:t>
             </a:r>
           </a:p>
           <a:p>
             <a:pPr lvl="3"/>
             <a:r>
-              <a:rPr lang="en-US" altLang="zh-TW" smtClean="0"/>
+              <a:rPr lang="en-US" altLang="zh-TW"/>
               <a:t>Fourth level</a:t>
             </a:r>
           </a:p>
           <a:p>
             <a:pPr lvl="4"/>
             <a:r>
-              <a:rPr lang="en-US" altLang="zh-TW" smtClean="0"/>
+              <a:rPr lang="en-US" altLang="zh-TW"/>
               <a:t>Fifth level</a:t>
             </a:r>
             <a:endParaRPr lang="zh-TW" altLang="en-US"/>
@@ -462,7 +467,7 @@
           <a:p>
             <a:fld id="{A7256215-C5DB-4B38-9517-E992CBA3016F}" type="datetimeFigureOut">
               <a:rPr lang="vi-VN" smtClean="0"/>
-              <a:t>09/06/2022</a:t>
+              <a:t>26/01/2025</a:t>
             </a:fld>
             <a:endParaRPr lang="vi-VN"/>
           </a:p>
@@ -561,7 +566,7 @@
           <a:lstStyle/>
           <a:p>
             <a:r>
-              <a:rPr lang="en-US" altLang="zh-TW" smtClean="0"/>
+              <a:rPr lang="en-US" altLang="zh-TW"/>
               <a:t>Click to edit Master title style</a:t>
             </a:r>
             <a:endParaRPr lang="zh-TW" altLang="en-US"/>
@@ -590,35 +595,35 @@
           <a:p>
             <a:pPr lvl="0"/>
             <a:r>
-              <a:rPr lang="en-US" altLang="zh-TW" smtClean="0"/>
+              <a:rPr lang="en-US" altLang="zh-TW"/>
               <a:t>Edit Master text styles</a:t>
             </a:r>
           </a:p>
           <a:p>
             <a:pPr lvl="1"/>
             <a:r>
-              <a:rPr lang="en-US" altLang="zh-TW" smtClean="0"/>
+              <a:rPr lang="en-US" altLang="zh-TW"/>
               <a:t>Second level</a:t>
             </a:r>
           </a:p>
           <a:p>
             <a:pPr lvl="2"/>
             <a:r>
-              <a:rPr lang="en-US" altLang="zh-TW" smtClean="0"/>
+              <a:rPr lang="en-US" altLang="zh-TW"/>
               <a:t>Third level</a:t>
             </a:r>
           </a:p>
           <a:p>
             <a:pPr lvl="3"/>
             <a:r>
-              <a:rPr lang="en-US" altLang="zh-TW" smtClean="0"/>
+              <a:rPr lang="en-US" altLang="zh-TW"/>
               <a:t>Fourth level</a:t>
             </a:r>
           </a:p>
           <a:p>
             <a:pPr lvl="4"/>
             <a:r>
-              <a:rPr lang="en-US" altLang="zh-TW" smtClean="0"/>
+              <a:rPr lang="en-US" altLang="zh-TW"/>
               <a:t>Fifth level</a:t>
             </a:r>
             <a:endParaRPr lang="zh-TW" altLang="en-US"/>
@@ -642,7 +647,7 @@
           <a:p>
             <a:fld id="{A7256215-C5DB-4B38-9517-E992CBA3016F}" type="datetimeFigureOut">
               <a:rPr lang="vi-VN" smtClean="0"/>
-              <a:t>09/06/2022</a:t>
+              <a:t>26/01/2025</a:t>
             </a:fld>
             <a:endParaRPr lang="vi-VN"/>
           </a:p>
@@ -736,7 +741,7 @@
           <a:lstStyle/>
           <a:p>
             <a:r>
-              <a:rPr lang="en-US" altLang="zh-TW" smtClean="0"/>
+              <a:rPr lang="en-US" altLang="zh-TW"/>
               <a:t>Click to edit Master title style</a:t>
             </a:r>
             <a:endParaRPr lang="zh-TW" altLang="en-US"/>
@@ -760,35 +765,35 @@
           <a:p>
             <a:pPr lvl="0"/>
             <a:r>
-              <a:rPr lang="en-US" altLang="zh-TW" smtClean="0"/>
+              <a:rPr lang="en-US" altLang="zh-TW"/>
               <a:t>Edit Master text styles</a:t>
             </a:r>
           </a:p>
           <a:p>
             <a:pPr lvl="1"/>
             <a:r>
-              <a:rPr lang="en-US" altLang="zh-TW" smtClean="0"/>
+              <a:rPr lang="en-US" altLang="zh-TW"/>
               <a:t>Second level</a:t>
             </a:r>
           </a:p>
           <a:p>
             <a:pPr lvl="2"/>
             <a:r>
-              <a:rPr lang="en-US" altLang="zh-TW" smtClean="0"/>
+              <a:rPr lang="en-US" altLang="zh-TW"/>
               <a:t>Third level</a:t>
             </a:r>
           </a:p>
           <a:p>
             <a:pPr lvl="3"/>
             <a:r>
-              <a:rPr lang="en-US" altLang="zh-TW" smtClean="0"/>
+              <a:rPr lang="en-US" altLang="zh-TW"/>
               <a:t>Fourth level</a:t>
             </a:r>
           </a:p>
           <a:p>
             <a:pPr lvl="4"/>
             <a:r>
-              <a:rPr lang="en-US" altLang="zh-TW" smtClean="0"/>
+              <a:rPr lang="en-US" altLang="zh-TW"/>
               <a:t>Fifth level</a:t>
             </a:r>
             <a:endParaRPr lang="zh-TW" altLang="en-US"/>
@@ -812,7 +817,7 @@
           <a:p>
             <a:fld id="{A7256215-C5DB-4B38-9517-E992CBA3016F}" type="datetimeFigureOut">
               <a:rPr lang="vi-VN" smtClean="0"/>
-              <a:t>09/06/2022</a:t>
+              <a:t>26/01/2025</a:t>
             </a:fld>
             <a:endParaRPr lang="vi-VN"/>
           </a:p>
@@ -915,7 +920,7 @@
           </a:lstStyle>
           <a:p>
             <a:r>
-              <a:rPr lang="en-US" altLang="zh-TW" smtClean="0"/>
+              <a:rPr lang="en-US" altLang="zh-TW"/>
               <a:t>Click to edit Master title style</a:t>
             </a:r>
             <a:endParaRPr lang="zh-TW" altLang="en-US"/>
@@ -1035,7 +1040,7 @@
           <a:p>
             <a:pPr lvl="0"/>
             <a:r>
-              <a:rPr lang="en-US" altLang="zh-TW" smtClean="0"/>
+              <a:rPr lang="en-US" altLang="zh-TW"/>
               <a:t>Edit Master text styles</a:t>
             </a:r>
           </a:p>
@@ -1058,7 +1063,7 @@
           <a:p>
             <a:fld id="{A7256215-C5DB-4B38-9517-E992CBA3016F}" type="datetimeFigureOut">
               <a:rPr lang="vi-VN" smtClean="0"/>
-              <a:t>09/06/2022</a:t>
+              <a:t>26/01/2025</a:t>
             </a:fld>
             <a:endParaRPr lang="vi-VN"/>
           </a:p>
@@ -1152,7 +1157,7 @@
           <a:lstStyle/>
           <a:p>
             <a:r>
-              <a:rPr lang="en-US" altLang="zh-TW" smtClean="0"/>
+              <a:rPr lang="en-US" altLang="zh-TW"/>
               <a:t>Click to edit Master title style</a:t>
             </a:r>
             <a:endParaRPr lang="zh-TW" altLang="en-US"/>
@@ -1209,35 +1214,35 @@
           <a:p>
             <a:pPr lvl="0"/>
             <a:r>
-              <a:rPr lang="en-US" altLang="zh-TW" smtClean="0"/>
+              <a:rPr lang="en-US" altLang="zh-TW"/>
               <a:t>Edit Master text styles</a:t>
             </a:r>
           </a:p>
           <a:p>
             <a:pPr lvl="1"/>
             <a:r>
-              <a:rPr lang="en-US" altLang="zh-TW" smtClean="0"/>
+              <a:rPr lang="en-US" altLang="zh-TW"/>
               <a:t>Second level</a:t>
             </a:r>
           </a:p>
           <a:p>
             <a:pPr lvl="2"/>
             <a:r>
-              <a:rPr lang="en-US" altLang="zh-TW" smtClean="0"/>
+              <a:rPr lang="en-US" altLang="zh-TW"/>
               <a:t>Third level</a:t>
             </a:r>
           </a:p>
           <a:p>
             <a:pPr lvl="3"/>
             <a:r>
-              <a:rPr lang="en-US" altLang="zh-TW" smtClean="0"/>
+              <a:rPr lang="en-US" altLang="zh-TW"/>
               <a:t>Fourth level</a:t>
             </a:r>
           </a:p>
           <a:p>
             <a:pPr lvl="4"/>
             <a:r>
-              <a:rPr lang="en-US" altLang="zh-TW" smtClean="0"/>
+              <a:rPr lang="en-US" altLang="zh-TW"/>
               <a:t>Fifth level</a:t>
             </a:r>
             <a:endParaRPr lang="zh-TW" altLang="en-US"/>
@@ -1294,35 +1299,35 @@
           <a:p>
             <a:pPr lvl="0"/>
             <a:r>
-              <a:rPr lang="en-US" altLang="zh-TW" smtClean="0"/>
+              <a:rPr lang="en-US" altLang="zh-TW"/>
               <a:t>Edit Master text styles</a:t>
             </a:r>
           </a:p>
           <a:p>
             <a:pPr lvl="1"/>
             <a:r>
-              <a:rPr lang="en-US" altLang="zh-TW" smtClean="0"/>
+              <a:rPr lang="en-US" altLang="zh-TW"/>
               <a:t>Second level</a:t>
             </a:r>
           </a:p>
           <a:p>
             <a:pPr lvl="2"/>
             <a:r>
-              <a:rPr lang="en-US" altLang="zh-TW" smtClean="0"/>
+              <a:rPr lang="en-US" altLang="zh-TW"/>
               <a:t>Third level</a:t>
             </a:r>
           </a:p>
           <a:p>
             <a:pPr lvl="3"/>
             <a:r>
-              <a:rPr lang="en-US" altLang="zh-TW" smtClean="0"/>
+              <a:rPr lang="en-US" altLang="zh-TW"/>
               <a:t>Fourth level</a:t>
             </a:r>
           </a:p>
           <a:p>
             <a:pPr lvl="4"/>
             <a:r>
-              <a:rPr lang="en-US" altLang="zh-TW" smtClean="0"/>
+              <a:rPr lang="en-US" altLang="zh-TW"/>
               <a:t>Fifth level</a:t>
             </a:r>
             <a:endParaRPr lang="zh-TW" altLang="en-US"/>
@@ -1346,7 +1351,7 @@
           <a:p>
             <a:fld id="{A7256215-C5DB-4B38-9517-E992CBA3016F}" type="datetimeFigureOut">
               <a:rPr lang="vi-VN" smtClean="0"/>
-              <a:t>09/06/2022</a:t>
+              <a:t>26/01/2025</a:t>
             </a:fld>
             <a:endParaRPr lang="vi-VN"/>
           </a:p>
@@ -1444,7 +1449,7 @@
           </a:lstStyle>
           <a:p>
             <a:r>
-              <a:rPr lang="en-US" altLang="zh-TW" smtClean="0"/>
+              <a:rPr lang="en-US" altLang="zh-TW"/>
               <a:t>Click to edit Master title style</a:t>
             </a:r>
             <a:endParaRPr lang="zh-TW" altLang="en-US"/>
@@ -1510,7 +1515,7 @@
           <a:p>
             <a:pPr lvl="0"/>
             <a:r>
-              <a:rPr lang="en-US" altLang="zh-TW" smtClean="0"/>
+              <a:rPr lang="en-US" altLang="zh-TW"/>
               <a:t>Edit Master text styles</a:t>
             </a:r>
           </a:p>
@@ -1566,35 +1571,35 @@
           <a:p>
             <a:pPr lvl="0"/>
             <a:r>
-              <a:rPr lang="en-US" altLang="zh-TW" smtClean="0"/>
+              <a:rPr lang="en-US" altLang="zh-TW"/>
               <a:t>Edit Master text styles</a:t>
             </a:r>
           </a:p>
           <a:p>
             <a:pPr lvl="1"/>
             <a:r>
-              <a:rPr lang="en-US" altLang="zh-TW" smtClean="0"/>
+              <a:rPr lang="en-US" altLang="zh-TW"/>
               <a:t>Second level</a:t>
             </a:r>
           </a:p>
           <a:p>
             <a:pPr lvl="2"/>
             <a:r>
-              <a:rPr lang="en-US" altLang="zh-TW" smtClean="0"/>
+              <a:rPr lang="en-US" altLang="zh-TW"/>
               <a:t>Third level</a:t>
             </a:r>
           </a:p>
           <a:p>
             <a:pPr lvl="3"/>
             <a:r>
-              <a:rPr lang="en-US" altLang="zh-TW" smtClean="0"/>
+              <a:rPr lang="en-US" altLang="zh-TW"/>
               <a:t>Fourth level</a:t>
             </a:r>
           </a:p>
           <a:p>
             <a:pPr lvl="4"/>
             <a:r>
-              <a:rPr lang="en-US" altLang="zh-TW" smtClean="0"/>
+              <a:rPr lang="en-US" altLang="zh-TW"/>
               <a:t>Fifth level</a:t>
             </a:r>
             <a:endParaRPr lang="zh-TW" altLang="en-US"/>
@@ -1660,7 +1665,7 @@
           <a:p>
             <a:pPr lvl="0"/>
             <a:r>
-              <a:rPr lang="en-US" altLang="zh-TW" smtClean="0"/>
+              <a:rPr lang="en-US" altLang="zh-TW"/>
               <a:t>Edit Master text styles</a:t>
             </a:r>
           </a:p>
@@ -1716,35 +1721,35 @@
           <a:p>
             <a:pPr lvl="0"/>
             <a:r>
-              <a:rPr lang="en-US" altLang="zh-TW" smtClean="0"/>
+              <a:rPr lang="en-US" altLang="zh-TW"/>
               <a:t>Edit Master text styles</a:t>
             </a:r>
           </a:p>
           <a:p>
             <a:pPr lvl="1"/>
             <a:r>
-              <a:rPr lang="en-US" altLang="zh-TW" smtClean="0"/>
+              <a:rPr lang="en-US" altLang="zh-TW"/>
               <a:t>Second level</a:t>
             </a:r>
           </a:p>
           <a:p>
             <a:pPr lvl="2"/>
             <a:r>
-              <a:rPr lang="en-US" altLang="zh-TW" smtClean="0"/>
+              <a:rPr lang="en-US" altLang="zh-TW"/>
               <a:t>Third level</a:t>
             </a:r>
           </a:p>
           <a:p>
             <a:pPr lvl="3"/>
             <a:r>
-              <a:rPr lang="en-US" altLang="zh-TW" smtClean="0"/>
+              <a:rPr lang="en-US" altLang="zh-TW"/>
               <a:t>Fourth level</a:t>
             </a:r>
           </a:p>
           <a:p>
             <a:pPr lvl="4"/>
             <a:r>
-              <a:rPr lang="en-US" altLang="zh-TW" smtClean="0"/>
+              <a:rPr lang="en-US" altLang="zh-TW"/>
               <a:t>Fifth level</a:t>
             </a:r>
             <a:endParaRPr lang="zh-TW" altLang="en-US"/>
@@ -1768,7 +1773,7 @@
           <a:p>
             <a:fld id="{A7256215-C5DB-4B38-9517-E992CBA3016F}" type="datetimeFigureOut">
               <a:rPr lang="vi-VN" smtClean="0"/>
-              <a:t>09/06/2022</a:t>
+              <a:t>26/01/2025</a:t>
             </a:fld>
             <a:endParaRPr lang="vi-VN"/>
           </a:p>
@@ -1862,7 +1867,7 @@
           <a:lstStyle/>
           <a:p>
             <a:r>
-              <a:rPr lang="en-US" altLang="zh-TW" smtClean="0"/>
+              <a:rPr lang="en-US" altLang="zh-TW"/>
               <a:t>Click to edit Master title style</a:t>
             </a:r>
             <a:endParaRPr lang="zh-TW" altLang="en-US"/>
@@ -1886,7 +1891,7 @@
           <a:p>
             <a:fld id="{A7256215-C5DB-4B38-9517-E992CBA3016F}" type="datetimeFigureOut">
               <a:rPr lang="vi-VN" smtClean="0"/>
-              <a:t>09/06/2022</a:t>
+              <a:t>26/01/2025</a:t>
             </a:fld>
             <a:endParaRPr lang="vi-VN"/>
           </a:p>
@@ -1981,7 +1986,7 @@
           <a:p>
             <a:fld id="{A7256215-C5DB-4B38-9517-E992CBA3016F}" type="datetimeFigureOut">
               <a:rPr lang="vi-VN" smtClean="0"/>
-              <a:t>09/06/2022</a:t>
+              <a:t>26/01/2025</a:t>
             </a:fld>
             <a:endParaRPr lang="vi-VN"/>
           </a:p>
@@ -2084,7 +2089,7 @@
           </a:lstStyle>
           <a:p>
             <a:r>
-              <a:rPr lang="en-US" altLang="zh-TW" smtClean="0"/>
+              <a:rPr lang="en-US" altLang="zh-TW"/>
               <a:t>Click to edit Master title style</a:t>
             </a:r>
             <a:endParaRPr lang="zh-TW" altLang="en-US"/>
@@ -2141,35 +2146,35 @@
           <a:p>
             <a:pPr lvl="0"/>
             <a:r>
-              <a:rPr lang="en-US" altLang="zh-TW" smtClean="0"/>
+              <a:rPr lang="en-US" altLang="zh-TW"/>
               <a:t>Edit Master text styles</a:t>
             </a:r>
           </a:p>
           <a:p>
             <a:pPr lvl="1"/>
             <a:r>
-              <a:rPr lang="en-US" altLang="zh-TW" smtClean="0"/>
+              <a:rPr lang="en-US" altLang="zh-TW"/>
               <a:t>Second level</a:t>
             </a:r>
           </a:p>
           <a:p>
             <a:pPr lvl="2"/>
             <a:r>
-              <a:rPr lang="en-US" altLang="zh-TW" smtClean="0"/>
+              <a:rPr lang="en-US" altLang="zh-TW"/>
               <a:t>Third level</a:t>
             </a:r>
           </a:p>
           <a:p>
             <a:pPr lvl="3"/>
             <a:r>
-              <a:rPr lang="en-US" altLang="zh-TW" smtClean="0"/>
+              <a:rPr lang="en-US" altLang="zh-TW"/>
               <a:t>Fourth level</a:t>
             </a:r>
           </a:p>
           <a:p>
             <a:pPr lvl="4"/>
             <a:r>
-              <a:rPr lang="en-US" altLang="zh-TW" smtClean="0"/>
+              <a:rPr lang="en-US" altLang="zh-TW"/>
               <a:t>Fifth level</a:t>
             </a:r>
             <a:endParaRPr lang="zh-TW" altLang="en-US"/>
@@ -2235,7 +2240,7 @@
           <a:p>
             <a:pPr lvl="0"/>
             <a:r>
-              <a:rPr lang="en-US" altLang="zh-TW" smtClean="0"/>
+              <a:rPr lang="en-US" altLang="zh-TW"/>
               <a:t>Edit Master text styles</a:t>
             </a:r>
           </a:p>
@@ -2258,7 +2263,7 @@
           <a:p>
             <a:fld id="{A7256215-C5DB-4B38-9517-E992CBA3016F}" type="datetimeFigureOut">
               <a:rPr lang="vi-VN" smtClean="0"/>
-              <a:t>09/06/2022</a:t>
+              <a:t>26/01/2025</a:t>
             </a:fld>
             <a:endParaRPr lang="vi-VN"/>
           </a:p>
@@ -2361,7 +2366,7 @@
           </a:lstStyle>
           <a:p>
             <a:r>
-              <a:rPr lang="en-US" altLang="zh-TW" smtClean="0"/>
+              <a:rPr lang="en-US" altLang="zh-TW"/>
               <a:t>Click to edit Master title style</a:t>
             </a:r>
             <a:endParaRPr lang="zh-TW" altLang="en-US"/>
@@ -2426,7 +2431,7 @@
           </a:lstStyle>
           <a:p>
             <a:r>
-              <a:rPr lang="en-US" altLang="zh-TW" smtClean="0"/>
+              <a:rPr lang="en-US" altLang="zh-TW"/>
               <a:t>Click icon to add picture</a:t>
             </a:r>
             <a:endParaRPr lang="zh-TW" altLang="en-US"/>
@@ -2492,7 +2497,7 @@
           <a:p>
             <a:pPr lvl="0"/>
             <a:r>
-              <a:rPr lang="en-US" altLang="zh-TW" smtClean="0"/>
+              <a:rPr lang="en-US" altLang="zh-TW"/>
               <a:t>Edit Master text styles</a:t>
             </a:r>
           </a:p>
@@ -2515,7 +2520,7 @@
           <a:p>
             <a:fld id="{A7256215-C5DB-4B38-9517-E992CBA3016F}" type="datetimeFigureOut">
               <a:rPr lang="vi-VN" smtClean="0"/>
-              <a:t>09/06/2022</a:t>
+              <a:t>26/01/2025</a:t>
             </a:fld>
             <a:endParaRPr lang="vi-VN"/>
           </a:p>
@@ -2629,10 +2634,9 @@
           <a:lstStyle/>
           <a:p>
             <a:r>
-              <a:rPr lang="zh-TW" altLang="en-US" smtClean="0"/>
+              <a:rPr lang="zh-TW" altLang="en-US"/>
               <a:t>按一下以編輯母片標題樣式</a:t>
             </a:r>
-            <a:endParaRPr lang="zh-TW" altLang="en-US"/>
           </a:p>
         </p:txBody>
       </p:sp>
@@ -2663,38 +2667,37 @@
           <a:p>
             <a:pPr lvl="0"/>
             <a:r>
-              <a:rPr lang="zh-TW" altLang="en-US" smtClean="0"/>
+              <a:rPr lang="zh-TW" altLang="en-US"/>
               <a:t>按一下以編輯母片文字樣式</a:t>
             </a:r>
           </a:p>
           <a:p>
             <a:pPr lvl="1"/>
             <a:r>
-              <a:rPr lang="zh-TW" altLang="en-US" smtClean="0"/>
+              <a:rPr lang="zh-TW" altLang="en-US"/>
               <a:t>第二層</a:t>
             </a:r>
           </a:p>
           <a:p>
             <a:pPr lvl="2"/>
             <a:r>
-              <a:rPr lang="zh-TW" altLang="en-US" smtClean="0"/>
+              <a:rPr lang="zh-TW" altLang="en-US"/>
               <a:t>第三層</a:t>
             </a:r>
           </a:p>
           <a:p>
             <a:pPr lvl="3"/>
             <a:r>
-              <a:rPr lang="zh-TW" altLang="en-US" smtClean="0"/>
+              <a:rPr lang="zh-TW" altLang="en-US"/>
               <a:t>第四層</a:t>
             </a:r>
           </a:p>
           <a:p>
             <a:pPr lvl="4"/>
             <a:r>
-              <a:rPr lang="zh-TW" altLang="en-US" smtClean="0"/>
+              <a:rPr lang="zh-TW" altLang="en-US"/>
               <a:t>第五層</a:t>
             </a:r>
-            <a:endParaRPr lang="zh-TW" altLang="en-US"/>
           </a:p>
         </p:txBody>
       </p:sp>
@@ -2733,7 +2736,7 @@
           <a:p>
             <a:fld id="{A7256215-C5DB-4B38-9517-E992CBA3016F}" type="datetimeFigureOut">
               <a:rPr lang="vi-VN" smtClean="0"/>
-              <a:t>09/06/2022</a:t>
+              <a:t>26/01/2025</a:t>
             </a:fld>
             <a:endParaRPr lang="vi-VN"/>
           </a:p>
@@ -3145,24 +3148,7 @@
                 <a:latin typeface="微軟正黑體" pitchFamily="34" charset="-120"/>
                 <a:ea typeface="微軟正黑體" pitchFamily="34" charset="-120"/>
               </a:rPr>
-              <a:t>愛</a:t>
-            </a:r>
-            <a:r>
-              <a:rPr lang="zh-TW" altLang="en-US" sz="7200" b="1" i="1" dirty="0">
-                <a:solidFill>
-                  <a:srgbClr val="000066"/>
-                </a:solidFill>
-                <a:effectLst>
-                  <a:outerShdw blurRad="38100" dist="38100" dir="2700000" algn="tl">
-                    <a:srgbClr val="000000">
-                      <a:alpha val="43137"/>
-                    </a:srgbClr>
-                  </a:outerShdw>
-                </a:effectLst>
-                <a:latin typeface="微軟正黑體" pitchFamily="34" charset="-120"/>
-                <a:ea typeface="微軟正黑體" pitchFamily="34" charset="-120"/>
-              </a:rPr>
-              <a:t>我們的家</a:t>
+              <a:t>愛我們的家</a:t>
             </a:r>
           </a:p>
         </p:txBody>
@@ -3305,7 +3291,7 @@
                 <a:latin typeface="Microsoft JhengHei" panose="020B0604030504040204" pitchFamily="34" charset="-120"/>
                 <a:ea typeface="Microsoft JhengHei" panose="020B0604030504040204" pitchFamily="34" charset="-120"/>
               </a:rPr>
-              <a:t>正</a:t>
+              <a:t>正歌</a:t>
             </a:r>
             <a:r>
               <a:rPr lang="en-US" sz="4267" b="1" dirty="0">
@@ -3464,7 +3450,7 @@
                 <a:latin typeface="Microsoft JhengHei" panose="020B0604030504040204" pitchFamily="34" charset="-120"/>
                 <a:ea typeface="Microsoft JhengHei" panose="020B0604030504040204" pitchFamily="34" charset="-120"/>
               </a:rPr>
-              <a:t>正</a:t>
+              <a:t>正歌</a:t>
             </a:r>
             <a:r>
               <a:rPr lang="en-US" sz="4267" b="1" dirty="0">
@@ -3623,7 +3609,7 @@
                 <a:latin typeface="Microsoft JhengHei" panose="020B0604030504040204" pitchFamily="34" charset="-120"/>
                 <a:ea typeface="Microsoft JhengHei" panose="020B0604030504040204" pitchFamily="34" charset="-120"/>
               </a:rPr>
-              <a:t>副</a:t>
+              <a:t>副歌</a:t>
             </a:r>
             <a:r>
               <a:rPr lang="en-US" sz="4267" b="1" dirty="0">
@@ -3782,10 +3768,10 @@
                 <a:latin typeface="Microsoft JhengHei" panose="020B0604030504040204" pitchFamily="34" charset="-120"/>
                 <a:ea typeface="Microsoft JhengHei" panose="020B0604030504040204" pitchFamily="34" charset="-120"/>
               </a:rPr>
-              <a:t>副</a:t>
-            </a:r>
-            <a:r>
-              <a:rPr lang="en-US" sz="4267" b="1" dirty="0">
+              <a:t>副歌</a:t>
+            </a:r>
+            <a:r>
+              <a:rPr lang="en-US" sz="4267" b="1">
                 <a:solidFill>
                   <a:srgbClr val="000066"/>
                 </a:solidFill>
